--- a/presentation.pptx
+++ b/presentation.pptx
@@ -5,7 +5,7 @@
     <p:sldMasterId id="2147483667" r:id="rId1"/>
   </p:sldMasterIdLst>
   <p:notesMasterIdLst>
-    <p:notesMasterId r:id="rId12"/>
+    <p:notesMasterId r:id="rId13"/>
   </p:notesMasterIdLst>
   <p:sldIdLst>
     <p:sldId id="272" r:id="rId2"/>
@@ -17,15 +17,16 @@
     <p:sldId id="299" r:id="rId8"/>
     <p:sldId id="286" r:id="rId9"/>
     <p:sldId id="300" r:id="rId10"/>
-    <p:sldId id="296" r:id="rId11"/>
+    <p:sldId id="301" r:id="rId11"/>
+    <p:sldId id="296" r:id="rId12"/>
   </p:sldIdLst>
   <p:sldSz cx="9144000" cy="5143500" type="screen16x9"/>
   <p:notesSz cx="6858000" cy="9144000"/>
   <p:embeddedFontLst>
     <p:embeddedFont>
       <p:font typeface="Assistant" pitchFamily="2" charset="-79"/>
-      <p:regular r:id="rId13"/>
-      <p:bold r:id="rId14"/>
+      <p:regular r:id="rId14"/>
+      <p:bold r:id="rId15"/>
     </p:embeddedFont>
   </p:embeddedFontLst>
   <p:defaultTextStyle>
@@ -257,6 +258,11 @@
       </a:defRPr>
     </a:lvl9pPr>
   </p:defaultTextStyle>
+  <p:extLst>
+    <p:ext uri="{EFAFB233-063F-42B5-8137-9DF3F51BA10A}">
+      <p15:sldGuideLst xmlns:p15="http://schemas.microsoft.com/office/powerpoint/2012/main"/>
+    </p:ext>
+  </p:extLst>
 </p:presentation>
 </file>
 
@@ -806,6 +812,133 @@
 </file>
 
 <file path=ppt/notesSlides/notesSlide10.xml><?xml version="1.0" encoding="utf-8"?>
+<p:notes xmlns:a="http://schemas.openxmlformats.org/drawingml/2006/main" xmlns:r="http://schemas.openxmlformats.org/officeDocument/2006/relationships" xmlns:p="http://schemas.openxmlformats.org/presentationml/2006/main" showMasterSp="0" showMasterPhAnim="0">
+  <p:cSld>
+    <p:spTree>
+      <p:nvGrpSpPr>
+        <p:cNvPr id="1" name="Shape 454">
+          <a:extLst>
+            <a:ext uri="{FF2B5EF4-FFF2-40B4-BE49-F238E27FC236}">
+              <a16:creationId xmlns:a16="http://schemas.microsoft.com/office/drawing/2014/main" id="{F459338F-23A9-DD7A-BDD4-6617FDA20D61}"/>
+            </a:ext>
+          </a:extLst>
+        </p:cNvPr>
+        <p:cNvGrpSpPr/>
+        <p:nvPr/>
+      </p:nvGrpSpPr>
+      <p:grpSpPr>
+        <a:xfrm>
+          <a:off x="0" y="0"/>
+          <a:ext cx="0" cy="0"/>
+          <a:chOff x="0" y="0"/>
+          <a:chExt cx="0" cy="0"/>
+        </a:xfrm>
+      </p:grpSpPr>
+      <p:sp>
+        <p:nvSpPr>
+          <p:cNvPr id="455" name="Google Shape;455;gb56d264711_0_259:notes">
+            <a:extLst>
+              <a:ext uri="{FF2B5EF4-FFF2-40B4-BE49-F238E27FC236}">
+                <a16:creationId xmlns:a16="http://schemas.microsoft.com/office/drawing/2014/main" id="{518CFF4B-6940-D7A2-F42C-3045AC5C1017}"/>
+              </a:ext>
+            </a:extLst>
+          </p:cNvPr>
+          <p:cNvSpPr>
+            <a:spLocks noGrp="1" noRot="1" noChangeAspect="1"/>
+          </p:cNvSpPr>
+          <p:nvPr>
+            <p:ph type="sldImg" idx="2"/>
+          </p:nvPr>
+        </p:nvSpPr>
+        <p:spPr>
+          <a:xfrm>
+            <a:off x="381000" y="685800"/>
+            <a:ext cx="6096000" cy="3429000"/>
+          </a:xfrm>
+          <a:custGeom>
+            <a:avLst/>
+            <a:gdLst/>
+            <a:ahLst/>
+            <a:cxnLst/>
+            <a:rect l="l" t="t" r="r" b="b"/>
+            <a:pathLst>
+              <a:path w="120000" h="120000" extrusionOk="0">
+                <a:moveTo>
+                  <a:pt x="0" y="0"/>
+                </a:moveTo>
+                <a:lnTo>
+                  <a:pt x="120000" y="0"/>
+                </a:lnTo>
+                <a:lnTo>
+                  <a:pt x="120000" y="120000"/>
+                </a:lnTo>
+                <a:lnTo>
+                  <a:pt x="0" y="120000"/>
+                </a:lnTo>
+                <a:close/>
+              </a:path>
+            </a:pathLst>
+          </a:custGeom>
+        </p:spPr>
+      </p:sp>
+      <p:sp>
+        <p:nvSpPr>
+          <p:cNvPr id="456" name="Google Shape;456;gb56d264711_0_259:notes">
+            <a:extLst>
+              <a:ext uri="{FF2B5EF4-FFF2-40B4-BE49-F238E27FC236}">
+                <a16:creationId xmlns:a16="http://schemas.microsoft.com/office/drawing/2014/main" id="{D9839EE9-8EBB-2719-3478-13815FD84191}"/>
+              </a:ext>
+            </a:extLst>
+          </p:cNvPr>
+          <p:cNvSpPr txBox="1">
+            <a:spLocks noGrp="1"/>
+          </p:cNvSpPr>
+          <p:nvPr>
+            <p:ph type="body" idx="1"/>
+          </p:nvPr>
+        </p:nvSpPr>
+        <p:spPr>
+          <a:xfrm>
+            <a:off x="685800" y="4343400"/>
+            <a:ext cx="5486400" cy="4114800"/>
+          </a:xfrm>
+          <a:prstGeom prst="rect">
+            <a:avLst/>
+          </a:prstGeom>
+        </p:spPr>
+        <p:txBody>
+          <a:bodyPr spcFirstLastPara="1" wrap="square" lIns="91425" tIns="91425" rIns="91425" bIns="91425" anchor="t" anchorCtr="0">
+            <a:noAutofit/>
+          </a:bodyPr>
+          <a:lstStyle/>
+          <a:p>
+            <a:pPr marL="0" lvl="0" indent="0" algn="l" rtl="0">
+              <a:spcBef>
+                <a:spcPts val="0"/>
+              </a:spcBef>
+              <a:spcAft>
+                <a:spcPts val="0"/>
+              </a:spcAft>
+              <a:buNone/>
+            </a:pPr>
+            <a:endParaRPr/>
+          </a:p>
+        </p:txBody>
+      </p:sp>
+    </p:spTree>
+    <p:extLst>
+      <p:ext uri="{BB962C8B-B14F-4D97-AF65-F5344CB8AC3E}">
+        <p14:creationId xmlns:p14="http://schemas.microsoft.com/office/powerpoint/2010/main" val="2143598024"/>
+      </p:ext>
+    </p:extLst>
+  </p:cSld>
+  <p:clrMapOvr>
+    <a:masterClrMapping/>
+  </p:clrMapOvr>
+</p:notes>
+</file>
+
+<file path=ppt/notesSlides/notesSlide11.xml><?xml version="1.0" encoding="utf-8"?>
 <p:notes xmlns:a="http://schemas.openxmlformats.org/drawingml/2006/main" xmlns:r="http://schemas.openxmlformats.org/officeDocument/2006/relationships" xmlns:p="http://schemas.openxmlformats.org/presentationml/2006/main" showMasterSp="0" showMasterPhAnim="0">
   <p:cSld>
     <p:spTree>
@@ -5880,6 +6013,360 @@
   <p:cSld>
     <p:spTree>
       <p:nvGrpSpPr>
+        <p:cNvPr id="1" name="Shape 457">
+          <a:extLst>
+            <a:ext uri="{FF2B5EF4-FFF2-40B4-BE49-F238E27FC236}">
+              <a16:creationId xmlns:a16="http://schemas.microsoft.com/office/drawing/2014/main" id="{3BBBB3EF-5083-E539-B4A1-A2D6D9B6F05C}"/>
+            </a:ext>
+          </a:extLst>
+        </p:cNvPr>
+        <p:cNvGrpSpPr/>
+        <p:nvPr/>
+      </p:nvGrpSpPr>
+      <p:grpSpPr>
+        <a:xfrm>
+          <a:off x="0" y="0"/>
+          <a:ext cx="0" cy="0"/>
+          <a:chOff x="0" y="0"/>
+          <a:chExt cx="0" cy="0"/>
+        </a:xfrm>
+      </p:grpSpPr>
+      <p:sp>
+        <p:nvSpPr>
+          <p:cNvPr id="458" name="Google Shape;458;p43">
+            <a:extLst>
+              <a:ext uri="{FF2B5EF4-FFF2-40B4-BE49-F238E27FC236}">
+                <a16:creationId xmlns:a16="http://schemas.microsoft.com/office/drawing/2014/main" id="{69BFDBB1-E5B3-AE54-ED5F-4ED30D9616BD}"/>
+              </a:ext>
+            </a:extLst>
+          </p:cNvPr>
+          <p:cNvSpPr txBox="1">
+            <a:spLocks noGrp="1"/>
+          </p:cNvSpPr>
+          <p:nvPr>
+            <p:ph type="title"/>
+          </p:nvPr>
+        </p:nvSpPr>
+        <p:spPr>
+          <a:xfrm>
+            <a:off x="311700" y="342900"/>
+            <a:ext cx="8147100" cy="572700"/>
+          </a:xfrm>
+          <a:prstGeom prst="rect">
+            <a:avLst/>
+          </a:prstGeom>
+        </p:spPr>
+        <p:txBody>
+          <a:bodyPr spcFirstLastPara="1" wrap="square" lIns="91425" tIns="91425" rIns="91425" bIns="91425" anchor="ctr" anchorCtr="0">
+            <a:normAutofit fontScale="90000"/>
+          </a:bodyPr>
+          <a:lstStyle/>
+          <a:p>
+            <a:pPr marL="0" lvl="0" indent="0" algn="l" rtl="0">
+              <a:spcBef>
+                <a:spcPts val="0"/>
+              </a:spcBef>
+              <a:spcAft>
+                <a:spcPts val="0"/>
+              </a:spcAft>
+              <a:buNone/>
+            </a:pPr>
+            <a:r>
+              <a:rPr lang="en" dirty="0"/>
+              <a:t>Use Of AI:</a:t>
+            </a:r>
+            <a:endParaRPr dirty="0"/>
+          </a:p>
+        </p:txBody>
+      </p:sp>
+      <p:sp>
+        <p:nvSpPr>
+          <p:cNvPr id="459" name="Google Shape;459;p43">
+            <a:extLst>
+              <a:ext uri="{FF2B5EF4-FFF2-40B4-BE49-F238E27FC236}">
+                <a16:creationId xmlns:a16="http://schemas.microsoft.com/office/drawing/2014/main" id="{1DCFA472-DC3A-5331-F239-501BAF5B1928}"/>
+              </a:ext>
+            </a:extLst>
+          </p:cNvPr>
+          <p:cNvSpPr txBox="1">
+            <a:spLocks noGrp="1"/>
+          </p:cNvSpPr>
+          <p:nvPr>
+            <p:ph type="body" idx="1"/>
+          </p:nvPr>
+        </p:nvSpPr>
+        <p:spPr>
+          <a:xfrm>
+            <a:off x="311700" y="915600"/>
+            <a:ext cx="7145907" cy="3747600"/>
+          </a:xfrm>
+          <a:prstGeom prst="rect">
+            <a:avLst/>
+          </a:prstGeom>
+        </p:spPr>
+        <p:txBody>
+          <a:bodyPr spcFirstLastPara="1" wrap="square" lIns="91425" tIns="91425" rIns="91425" bIns="91425" anchor="t" anchorCtr="0">
+            <a:normAutofit/>
+          </a:bodyPr>
+          <a:lstStyle/>
+          <a:p>
+            <a:pPr marL="0" indent="0" algn="just">
+              <a:buNone/>
+            </a:pPr>
+            <a:r>
+              <a:rPr lang="en-US" dirty="0"/>
+              <a:t>I used AI for the following reasons:</a:t>
+            </a:r>
+          </a:p>
+          <a:p>
+            <a:pPr marL="285750" indent="-285750" algn="just"/>
+            <a:r>
+              <a:rPr lang="en-US" dirty="0"/>
+              <a:t>To merge each and every data in the JSON file and convert it to CSV, I merged around 30000 JSON files.</a:t>
+            </a:r>
+          </a:p>
+          <a:p>
+            <a:pPr marL="285750" indent="-285750" algn="just"/>
+            <a:r>
+              <a:rPr lang="en-US" dirty="0"/>
+              <a:t>Specifically, to format the markdowns written in the notebook.</a:t>
+            </a:r>
+          </a:p>
+          <a:p>
+            <a:pPr marL="285750" indent="-285750" algn="just"/>
+            <a:r>
+              <a:rPr lang="en-US" dirty="0"/>
+              <a:t>First, I roughly plotted graphs for the data, and then using AI added colors and formatted it in such a way that they looks good.</a:t>
+            </a:r>
+            <a:endParaRPr dirty="0"/>
+          </a:p>
+        </p:txBody>
+      </p:sp>
+      <p:sp>
+        <p:nvSpPr>
+          <p:cNvPr id="460" name="Google Shape;460;p43">
+            <a:extLst>
+              <a:ext uri="{FF2B5EF4-FFF2-40B4-BE49-F238E27FC236}">
+                <a16:creationId xmlns:a16="http://schemas.microsoft.com/office/drawing/2014/main" id="{32D7A275-B30C-DE34-7E07-686353536C05}"/>
+              </a:ext>
+            </a:extLst>
+          </p:cNvPr>
+          <p:cNvSpPr txBox="1">
+            <a:spLocks noGrp="1"/>
+          </p:cNvSpPr>
+          <p:nvPr>
+            <p:ph type="sldNum" idx="12"/>
+          </p:nvPr>
+        </p:nvSpPr>
+        <p:spPr>
+          <a:xfrm>
+            <a:off x="8466613" y="4762672"/>
+            <a:ext cx="365700" cy="274200"/>
+          </a:xfrm>
+          <a:prstGeom prst="rect">
+            <a:avLst/>
+          </a:prstGeom>
+        </p:spPr>
+        <p:txBody>
+          <a:bodyPr spcFirstLastPara="1" wrap="square" lIns="91425" tIns="91425" rIns="91425" bIns="91425" anchor="ctr" anchorCtr="0">
+            <a:normAutofit fontScale="92500" lnSpcReduction="20000"/>
+          </a:bodyPr>
+          <a:lstStyle/>
+          <a:p>
+            <a:pPr marL="0" lvl="0" indent="0" algn="r" rtl="0">
+              <a:spcBef>
+                <a:spcPts val="0"/>
+              </a:spcBef>
+              <a:spcAft>
+                <a:spcPts val="0"/>
+              </a:spcAft>
+              <a:buNone/>
+            </a:pPr>
+            <a:fld id="{00000000-1234-1234-1234-123412341234}" type="slidenum">
+              <a:rPr lang="en"/>
+              <a:t>10</a:t>
+            </a:fld>
+            <a:endParaRPr/>
+          </a:p>
+        </p:txBody>
+      </p:sp>
+      <p:grpSp>
+        <p:nvGrpSpPr>
+          <p:cNvPr id="461" name="Google Shape;461;p43">
+            <a:extLst>
+              <a:ext uri="{FF2B5EF4-FFF2-40B4-BE49-F238E27FC236}">
+                <a16:creationId xmlns:a16="http://schemas.microsoft.com/office/drawing/2014/main" id="{BFB00360-4793-4BDF-66F7-3659971A0A9A}"/>
+              </a:ext>
+            </a:extLst>
+          </p:cNvPr>
+          <p:cNvGrpSpPr/>
+          <p:nvPr/>
+        </p:nvGrpSpPr>
+        <p:grpSpPr>
+          <a:xfrm rot="2699785">
+            <a:off x="482122" y="4029609"/>
+            <a:ext cx="1208946" cy="982653"/>
+            <a:chOff x="2318413" y="2452450"/>
+            <a:chExt cx="1067700" cy="867900"/>
+          </a:xfrm>
+        </p:grpSpPr>
+        <p:sp>
+          <p:nvSpPr>
+            <p:cNvPr id="462" name="Google Shape;462;p43">
+              <a:extLst>
+                <a:ext uri="{FF2B5EF4-FFF2-40B4-BE49-F238E27FC236}">
+                  <a16:creationId xmlns:a16="http://schemas.microsoft.com/office/drawing/2014/main" id="{5BDFDB08-6CB9-A385-171D-D2DA70A1A9CF}"/>
+                </a:ext>
+              </a:extLst>
+            </p:cNvPr>
+            <p:cNvSpPr/>
+            <p:nvPr/>
+          </p:nvSpPr>
+          <p:spPr>
+            <a:xfrm>
+              <a:off x="2318413" y="2528650"/>
+              <a:ext cx="915300" cy="791700"/>
+            </a:xfrm>
+            <a:prstGeom prst="triangle">
+              <a:avLst>
+                <a:gd name="adj" fmla="val 50000"/>
+              </a:avLst>
+            </a:prstGeom>
+            <a:noFill/>
+            <a:ln w="19050" cap="flat" cmpd="sng">
+              <a:solidFill>
+                <a:schemeClr val="accent6"/>
+              </a:solidFill>
+              <a:prstDash val="solid"/>
+              <a:round/>
+              <a:headEnd type="none" w="sm" len="sm"/>
+              <a:tailEnd type="none" w="sm" len="sm"/>
+            </a:ln>
+          </p:spPr>
+          <p:txBody>
+            <a:bodyPr spcFirstLastPara="1" wrap="square" lIns="91425" tIns="91425" rIns="91425" bIns="91425" anchor="ctr" anchorCtr="0">
+              <a:noAutofit/>
+            </a:bodyPr>
+            <a:lstStyle/>
+            <a:p>
+              <a:pPr marL="0" lvl="0" indent="0" algn="l" rtl="0">
+                <a:spcBef>
+                  <a:spcPts val="0"/>
+                </a:spcBef>
+                <a:spcAft>
+                  <a:spcPts val="0"/>
+                </a:spcAft>
+                <a:buNone/>
+              </a:pPr>
+              <a:endParaRPr/>
+            </a:p>
+          </p:txBody>
+        </p:sp>
+        <p:sp>
+          <p:nvSpPr>
+            <p:cNvPr id="463" name="Google Shape;463;p43">
+              <a:extLst>
+                <a:ext uri="{FF2B5EF4-FFF2-40B4-BE49-F238E27FC236}">
+                  <a16:creationId xmlns:a16="http://schemas.microsoft.com/office/drawing/2014/main" id="{74E4B45E-8887-C238-8F72-F85F0319BADF}"/>
+                </a:ext>
+              </a:extLst>
+            </p:cNvPr>
+            <p:cNvSpPr/>
+            <p:nvPr/>
+          </p:nvSpPr>
+          <p:spPr>
+            <a:xfrm>
+              <a:off x="2470813" y="2452450"/>
+              <a:ext cx="915300" cy="791700"/>
+            </a:xfrm>
+            <a:prstGeom prst="triangle">
+              <a:avLst>
+                <a:gd name="adj" fmla="val 50000"/>
+              </a:avLst>
+            </a:prstGeom>
+            <a:noFill/>
+            <a:ln w="19050" cap="flat" cmpd="sng">
+              <a:solidFill>
+                <a:schemeClr val="accent4"/>
+              </a:solidFill>
+              <a:prstDash val="solid"/>
+              <a:round/>
+              <a:headEnd type="none" w="sm" len="sm"/>
+              <a:tailEnd type="none" w="sm" len="sm"/>
+            </a:ln>
+          </p:spPr>
+          <p:txBody>
+            <a:bodyPr spcFirstLastPara="1" wrap="square" lIns="91425" tIns="91425" rIns="91425" bIns="91425" anchor="ctr" anchorCtr="0">
+              <a:noAutofit/>
+            </a:bodyPr>
+            <a:lstStyle/>
+            <a:p>
+              <a:pPr marL="0" lvl="0" indent="0" algn="l" rtl="0">
+                <a:spcBef>
+                  <a:spcPts val="0"/>
+                </a:spcBef>
+                <a:spcAft>
+                  <a:spcPts val="0"/>
+                </a:spcAft>
+                <a:buNone/>
+              </a:pPr>
+              <a:endParaRPr/>
+            </a:p>
+          </p:txBody>
+        </p:sp>
+      </p:grpSp>
+      <p:pic>
+        <p:nvPicPr>
+          <p:cNvPr id="464" name="Google Shape;464;p43">
+            <a:extLst>
+              <a:ext uri="{FF2B5EF4-FFF2-40B4-BE49-F238E27FC236}">
+                <a16:creationId xmlns:a16="http://schemas.microsoft.com/office/drawing/2014/main" id="{F6394287-AAF9-B3BC-C574-65D4CA351CB3}"/>
+              </a:ext>
+            </a:extLst>
+          </p:cNvPr>
+          <p:cNvPicPr preferRelativeResize="0"/>
+          <p:nvPr/>
+        </p:nvPicPr>
+        <p:blipFill>
+          <a:blip r:embed="rId3">
+            <a:alphaModFix/>
+          </a:blip>
+          <a:stretch>
+            <a:fillRect/>
+          </a:stretch>
+        </p:blipFill>
+        <p:spPr>
+          <a:xfrm>
+            <a:off x="7747370" y="1972579"/>
+            <a:ext cx="1084950" cy="1135025"/>
+          </a:xfrm>
+          <a:prstGeom prst="rect">
+            <a:avLst/>
+          </a:prstGeom>
+          <a:noFill/>
+          <a:ln>
+            <a:noFill/>
+          </a:ln>
+        </p:spPr>
+      </p:pic>
+    </p:spTree>
+    <p:extLst>
+      <p:ext uri="{BB962C8B-B14F-4D97-AF65-F5344CB8AC3E}">
+        <p14:creationId xmlns:p14="http://schemas.microsoft.com/office/powerpoint/2010/main" val="1139514115"/>
+      </p:ext>
+    </p:extLst>
+  </p:cSld>
+  <p:clrMapOvr>
+    <a:masterClrMapping/>
+  </p:clrMapOvr>
+</p:sld>
+</file>
+
+<file path=ppt/slides/slide11.xml><?xml version="1.0" encoding="utf-8"?>
+<p:sld xmlns:a="http://schemas.openxmlformats.org/drawingml/2006/main" xmlns:r="http://schemas.openxmlformats.org/officeDocument/2006/relationships" xmlns:p="http://schemas.openxmlformats.org/presentationml/2006/main">
+  <p:cSld>
+    <p:spTree>
+      <p:nvGrpSpPr>
         <p:cNvPr id="1" name="Shape 652"/>
         <p:cNvGrpSpPr/>
         <p:nvPr/>
@@ -5928,7 +6415,7 @@
             </a:pPr>
             <a:fld id="{00000000-1234-1234-1234-123412341234}" type="slidenum">
               <a:rPr lang="en"/>
-              <a:t>10</a:t>
+              <a:t>11</a:t>
             </a:fld>
             <a:endParaRPr/>
           </a:p>
@@ -10307,7 +10794,7 @@
             </a:pPr>
             <a:r>
               <a:rPr lang="en" dirty="0"/>
-              <a:t>Use Of AI:</a:t>
+              <a:t>Further Enhancement:</a:t>
             </a:r>
             <a:endParaRPr dirty="0"/>
           </a:p>
@@ -10344,35 +10831,25 @@
           </a:bodyPr>
           <a:lstStyle/>
           <a:p>
-            <a:pPr marL="0" indent="0" algn="just">
-              <a:buNone/>
-            </a:pPr>
+            <a:pPr marL="285750" indent="-285750" algn="just"/>
             <a:r>
               <a:rPr lang="en-US" dirty="0"/>
-              <a:t>I used AI for the following reasons:</a:t>
+              <a:t>Try to predict more parameters like, chance of getting a compilation error during PD stage.</a:t>
             </a:r>
           </a:p>
           <a:p>
             <a:pPr marL="285750" indent="-285750" algn="just"/>
             <a:r>
               <a:rPr lang="en-US" dirty="0"/>
-              <a:t>To merge each and every data in the JSON file and convert it to CSV, I merged around 30000 JSON files.</a:t>
+              <a:t>Try to predict the tuning parameters for the EDA software, which can accelerate pipeline further more.</a:t>
             </a:r>
           </a:p>
           <a:p>
             <a:pPr marL="285750" indent="-285750" algn="just"/>
             <a:r>
               <a:rPr lang="en-US" dirty="0"/>
-              <a:t>Specifically, to format the markdowns written in the notebook.</a:t>
+              <a:t>Try to predict parasitic components inside the chip, which can cause problems in the design, but that can only be detected in final stage. Which can cause large delays in the chip production.</a:t>
             </a:r>
-          </a:p>
-          <a:p>
-            <a:pPr marL="285750" indent="-285750" algn="just"/>
-            <a:r>
-              <a:rPr lang="en-US" dirty="0"/>
-              <a:t>First, I roughly plotted graphs for the data, and then using AI added colors and formatted it in such a way that they looks good.</a:t>
-            </a:r>
-            <a:endParaRPr dirty="0"/>
           </a:p>
         </p:txBody>
       </p:sp>
